--- a/Google Developer Groups Newport Beach x RocketRide.pptx
+++ b/Google Developer Groups Newport Beach x RocketRide.pptx
@@ -56239,8 +56239,8 @@
         </p:blipFill>
         <p:spPr>
           <a:xfrm>
-            <a:off x="152400" y="1203972"/>
-            <a:ext cx="8839200" cy="3452675"/>
+            <a:off x="152400" y="1414422"/>
+            <a:ext cx="8839200" cy="3099460"/>
           </a:xfrm>
           <a:prstGeom prst="rect">
             <a:avLst/>
